--- a/doc/Blood Glucose Prediction Model Applicable to Continuous Glucose Monitoring Systems.pptx
+++ b/doc/Blood Glucose Prediction Model Applicable to Continuous Glucose Monitoring Systems.pptx
@@ -24845,6 +24845,29 @@
       </p:grpSpPr>
       <p:sp>
         <p:nvSpPr>
+          <p:cNvPr id="5" name="Shape 19"/>
+          <p:cNvSpPr/>
+          <p:nvPr/>
+        </p:nvSpPr>
+        <p:spPr>
+          <a:xfrm>
+            <a:off x="504825" y="5600065"/>
+            <a:ext cx="2616835" cy="475615"/>
+          </a:xfrm>
+          <a:prstGeom prst="roundRect">
+            <a:avLst>
+              <a:gd name="adj" fmla="val 8000"/>
+            </a:avLst>
+          </a:prstGeom>
+          <a:solidFill>
+            <a:schemeClr val="accent6">
+              <a:lumMod val="75000"/>
+            </a:schemeClr>
+          </a:solidFill>
+        </p:spPr>
+      </p:sp>
+      <p:sp>
+        <p:nvSpPr>
           <p:cNvPr id="2" name="Shape 0"/>
           <p:cNvSpPr/>
           <p:nvPr/>
@@ -25079,7 +25102,7 @@
                 <a:ea typeface="Arial" panose="020B0604020202020204" pitchFamily="34" charset="-122"/>
                 <a:cs typeface="Arial" panose="020B0604020202020204" pitchFamily="34" charset="-120"/>
               </a:rPr>
-              <a:t>What if only day-one data is available? 30-50 samples (~2.5 hours)</a:t>
+              <a:t>What if only one day data is available? 30-50 samples (~2.5 hours)</a:t>
             </a:r>
             <a:endParaRPr lang="en-US" sz="1600" dirty="0"/>
           </a:p>
@@ -25195,7 +25218,7 @@
             <a:r>
               <a:rPr lang="en-US" sz="1700" b="1" dirty="0">
                 <a:solidFill>
-                  <a:srgbClr val="000000"/>
+                  <a:schemeClr val="bg1"/>
                 </a:solidFill>
                 <a:latin typeface="Arial" panose="020B0604020202020204" pitchFamily="34" charset="0"/>
                 <a:ea typeface="Arial" panose="020B0604020202020204" pitchFamily="34" charset="-122"/>
@@ -25203,7 +25226,11 @@
               </a:rPr>
               <a:t>Meta-learning solution:</a:t>
             </a:r>
-            <a:endParaRPr lang="en-US" sz="1600" dirty="0"/>
+            <a:endParaRPr lang="en-US" sz="1600" dirty="0">
+              <a:solidFill>
+                <a:schemeClr val="bg1"/>
+              </a:solidFill>
+            </a:endParaRPr>
           </a:p>
           <a:p>
             <a:pPr>
